--- a/lectures/2026_GNET749_Lecture2.pptx
+++ b/lectures/2026_GNET749_Lecture2.pptx
@@ -228,7 +228,7 @@
           <a:p>
             <a:fld id="{DE4242AA-3937-624B-9BD8-F1C01C498458}" type="datetimeFigureOut">
               <a:rPr lang="en-US" smtClean="0"/>
-              <a:t>4/12/25</a:t>
+              <a:t>4/20/26</a:t>
             </a:fld>
             <a:endParaRPr lang="en-US"/>
           </a:p>
@@ -886,7 +886,7 @@
           <a:p>
             <a:fld id="{B56C126C-0D09-7346-9096-8E1075EB9758}" type="datetimeFigureOut">
               <a:rPr lang="en-US" smtClean="0"/>
-              <a:t>4/12/25</a:t>
+              <a:t>4/20/26</a:t>
             </a:fld>
             <a:endParaRPr lang="en-US"/>
           </a:p>
@@ -1084,7 +1084,7 @@
           <a:p>
             <a:fld id="{B56C126C-0D09-7346-9096-8E1075EB9758}" type="datetimeFigureOut">
               <a:rPr lang="en-US" smtClean="0"/>
-              <a:t>4/12/25</a:t>
+              <a:t>4/20/26</a:t>
             </a:fld>
             <a:endParaRPr lang="en-US"/>
           </a:p>
@@ -1292,7 +1292,7 @@
           <a:p>
             <a:fld id="{B56C126C-0D09-7346-9096-8E1075EB9758}" type="datetimeFigureOut">
               <a:rPr lang="en-US" smtClean="0"/>
-              <a:t>4/12/25</a:t>
+              <a:t>4/20/26</a:t>
             </a:fld>
             <a:endParaRPr lang="en-US"/>
           </a:p>
@@ -1490,7 +1490,7 @@
           <a:p>
             <a:fld id="{B56C126C-0D09-7346-9096-8E1075EB9758}" type="datetimeFigureOut">
               <a:rPr lang="en-US" smtClean="0"/>
-              <a:t>4/12/25</a:t>
+              <a:t>4/20/26</a:t>
             </a:fld>
             <a:endParaRPr lang="en-US"/>
           </a:p>
@@ -1765,7 +1765,7 @@
           <a:p>
             <a:fld id="{B56C126C-0D09-7346-9096-8E1075EB9758}" type="datetimeFigureOut">
               <a:rPr lang="en-US" smtClean="0"/>
-              <a:t>4/12/25</a:t>
+              <a:t>4/20/26</a:t>
             </a:fld>
             <a:endParaRPr lang="en-US"/>
           </a:p>
@@ -2030,7 +2030,7 @@
           <a:p>
             <a:fld id="{B56C126C-0D09-7346-9096-8E1075EB9758}" type="datetimeFigureOut">
               <a:rPr lang="en-US" smtClean="0"/>
-              <a:t>4/12/25</a:t>
+              <a:t>4/20/26</a:t>
             </a:fld>
             <a:endParaRPr lang="en-US"/>
           </a:p>
@@ -2442,7 +2442,7 @@
           <a:p>
             <a:fld id="{B56C126C-0D09-7346-9096-8E1075EB9758}" type="datetimeFigureOut">
               <a:rPr lang="en-US" smtClean="0"/>
-              <a:t>4/12/25</a:t>
+              <a:t>4/20/26</a:t>
             </a:fld>
             <a:endParaRPr lang="en-US"/>
           </a:p>
@@ -2583,7 +2583,7 @@
           <a:p>
             <a:fld id="{B56C126C-0D09-7346-9096-8E1075EB9758}" type="datetimeFigureOut">
               <a:rPr lang="en-US" smtClean="0"/>
-              <a:t>4/12/25</a:t>
+              <a:t>4/20/26</a:t>
             </a:fld>
             <a:endParaRPr lang="en-US"/>
           </a:p>
@@ -2696,7 +2696,7 @@
           <a:p>
             <a:fld id="{B56C126C-0D09-7346-9096-8E1075EB9758}" type="datetimeFigureOut">
               <a:rPr lang="en-US" smtClean="0"/>
-              <a:t>4/12/25</a:t>
+              <a:t>4/20/26</a:t>
             </a:fld>
             <a:endParaRPr lang="en-US"/>
           </a:p>
@@ -3007,7 +3007,7 @@
           <a:p>
             <a:fld id="{B56C126C-0D09-7346-9096-8E1075EB9758}" type="datetimeFigureOut">
               <a:rPr lang="en-US" smtClean="0"/>
-              <a:t>4/12/25</a:t>
+              <a:t>4/20/26</a:t>
             </a:fld>
             <a:endParaRPr lang="en-US"/>
           </a:p>
@@ -3295,7 +3295,7 @@
           <a:p>
             <a:fld id="{B56C126C-0D09-7346-9096-8E1075EB9758}" type="datetimeFigureOut">
               <a:rPr lang="en-US" smtClean="0"/>
-              <a:t>4/12/25</a:t>
+              <a:t>4/20/26</a:t>
             </a:fld>
             <a:endParaRPr lang="en-US"/>
           </a:p>
@@ -3536,7 +3536,7 @@
           <a:p>
             <a:fld id="{B56C126C-0D09-7346-9096-8E1075EB9758}" type="datetimeFigureOut">
               <a:rPr lang="en-US" smtClean="0"/>
-              <a:t>4/12/25</a:t>
+              <a:t>4/20/26</a:t>
             </a:fld>
             <a:endParaRPr lang="en-US"/>
           </a:p>
@@ -5999,7 +5999,7 @@
           </a:ln>
           <a:extLst>
             <a:ext uri="{C572A759-6A51-4108-AA02-DFA0A04FC94B}">
-              <ma14:wrappingTextBoxFlag xmlns="" xmlns:m="http://schemas.openxmlformats.org/officeDocument/2006/math" xmlns:a14="http://schemas.microsoft.com/office/drawing/2010/main" xmlns:ma14="http://schemas.microsoft.com/office/mac/drawingml/2011/main" val="1"/>
+              <ma14:wrappingTextBoxFlag xmlns:ma14="http://schemas.microsoft.com/office/mac/drawingml/2011/main" xmlns:a14="http://schemas.microsoft.com/office/drawing/2010/main" xmlns:m="http://schemas.openxmlformats.org/officeDocument/2006/math" xmlns="" val="1"/>
             </a:ext>
           </a:extLst>
         </p:spPr>
@@ -6091,7 +6091,7 @@
           </a:ln>
           <a:extLst>
             <a:ext uri="{C572A759-6A51-4108-AA02-DFA0A04FC94B}">
-              <ma14:wrappingTextBoxFlag xmlns:ma14="http://schemas.microsoft.com/office/mac/drawingml/2011/main" xmlns:a14="http://schemas.microsoft.com/office/drawing/2010/main" xmlns:m="http://schemas.openxmlformats.org/officeDocument/2006/math" xmlns="" val="1"/>
+              <ma14:wrappingTextBoxFlag xmlns="" xmlns:m="http://schemas.openxmlformats.org/officeDocument/2006/math" xmlns:a14="http://schemas.microsoft.com/office/drawing/2010/main" xmlns:ma14="http://schemas.microsoft.com/office/mac/drawingml/2011/main" val="1"/>
             </a:ext>
           </a:extLst>
         </p:spPr>
@@ -6242,7 +6242,7 @@
           </a:ln>
           <a:extLst>
             <a:ext uri="{C572A759-6A51-4108-AA02-DFA0A04FC94B}">
-              <ma14:wrappingTextBoxFlag xmlns="" xmlns:m="http://schemas.openxmlformats.org/officeDocument/2006/math" xmlns:a14="http://schemas.microsoft.com/office/drawing/2010/main" xmlns:ma14="http://schemas.microsoft.com/office/mac/drawingml/2011/main" val="1"/>
+              <ma14:wrappingTextBoxFlag xmlns:ma14="http://schemas.microsoft.com/office/mac/drawingml/2011/main" xmlns:a14="http://schemas.microsoft.com/office/drawing/2010/main" xmlns:m="http://schemas.openxmlformats.org/officeDocument/2006/math" xmlns="" val="1"/>
             </a:ext>
           </a:extLst>
         </p:spPr>
@@ -6282,7 +6282,7 @@
           </a:ln>
           <a:extLst>
             <a:ext uri="{C572A759-6A51-4108-AA02-DFA0A04FC94B}">
-              <ma14:wrappingTextBoxFlag xmlns="" xmlns:m="http://schemas.openxmlformats.org/officeDocument/2006/math" xmlns:a14="http://schemas.microsoft.com/office/drawing/2010/main" xmlns:ma14="http://schemas.microsoft.com/office/mac/drawingml/2011/main" val="1"/>
+              <ma14:wrappingTextBoxFlag xmlns:ma14="http://schemas.microsoft.com/office/mac/drawingml/2011/main" xmlns:a14="http://schemas.microsoft.com/office/drawing/2010/main" xmlns:m="http://schemas.openxmlformats.org/officeDocument/2006/math" xmlns="" val="1"/>
             </a:ext>
           </a:extLst>
         </p:spPr>
@@ -6322,7 +6322,7 @@
           </a:ln>
           <a:extLst>
             <a:ext uri="{C572A759-6A51-4108-AA02-DFA0A04FC94B}">
-              <ma14:wrappingTextBoxFlag xmlns="" xmlns:m="http://schemas.openxmlformats.org/officeDocument/2006/math" xmlns:a14="http://schemas.microsoft.com/office/drawing/2010/main" xmlns:ma14="http://schemas.microsoft.com/office/mac/drawingml/2011/main" val="1"/>
+              <ma14:wrappingTextBoxFlag xmlns:ma14="http://schemas.microsoft.com/office/mac/drawingml/2011/main" xmlns:a14="http://schemas.microsoft.com/office/drawing/2010/main" xmlns:m="http://schemas.openxmlformats.org/officeDocument/2006/math" xmlns="" val="1"/>
             </a:ext>
           </a:extLst>
         </p:spPr>
@@ -6447,7 +6447,7 @@
           </a:ln>
           <a:extLst>
             <a:ext uri="{C572A759-6A51-4108-AA02-DFA0A04FC94B}">
-              <ma14:wrappingTextBoxFlag xmlns="" xmlns:m="http://schemas.openxmlformats.org/officeDocument/2006/math" xmlns:a14="http://schemas.microsoft.com/office/drawing/2010/main" xmlns:ma14="http://schemas.microsoft.com/office/mac/drawingml/2011/main" val="1"/>
+              <ma14:wrappingTextBoxFlag xmlns:ma14="http://schemas.microsoft.com/office/mac/drawingml/2011/main" xmlns:a14="http://schemas.microsoft.com/office/drawing/2010/main" xmlns:m="http://schemas.openxmlformats.org/officeDocument/2006/math" xmlns="" val="1"/>
             </a:ext>
           </a:extLst>
         </p:spPr>
@@ -6487,7 +6487,7 @@
           </a:ln>
           <a:extLst>
             <a:ext uri="{C572A759-6A51-4108-AA02-DFA0A04FC94B}">
-              <ma14:wrappingTextBoxFlag xmlns="" xmlns:m="http://schemas.openxmlformats.org/officeDocument/2006/math" xmlns:a14="http://schemas.microsoft.com/office/drawing/2010/main" xmlns:ma14="http://schemas.microsoft.com/office/mac/drawingml/2011/main" val="1"/>
+              <ma14:wrappingTextBoxFlag xmlns:ma14="http://schemas.microsoft.com/office/mac/drawingml/2011/main" xmlns:a14="http://schemas.microsoft.com/office/drawing/2010/main" xmlns:m="http://schemas.openxmlformats.org/officeDocument/2006/math" xmlns="" val="1"/>
             </a:ext>
           </a:extLst>
         </p:spPr>
@@ -6606,7 +6606,7 @@
           </a:ln>
           <a:extLst>
             <a:ext uri="{C572A759-6A51-4108-AA02-DFA0A04FC94B}">
-              <ma14:wrappingTextBoxFlag xmlns="" xmlns:m="http://schemas.openxmlformats.org/officeDocument/2006/math" xmlns:a14="http://schemas.microsoft.com/office/drawing/2010/main" xmlns:ma14="http://schemas.microsoft.com/office/mac/drawingml/2011/main" val="1"/>
+              <ma14:wrappingTextBoxFlag xmlns:ma14="http://schemas.microsoft.com/office/mac/drawingml/2011/main" xmlns:a14="http://schemas.microsoft.com/office/drawing/2010/main" xmlns:m="http://schemas.openxmlformats.org/officeDocument/2006/math" xmlns="" val="1"/>
             </a:ext>
           </a:extLst>
         </p:spPr>
@@ -6725,7 +6725,7 @@
           </a:ln>
           <a:extLst>
             <a:ext uri="{C572A759-6A51-4108-AA02-DFA0A04FC94B}">
-              <ma14:wrappingTextBoxFlag xmlns="" xmlns:m="http://schemas.openxmlformats.org/officeDocument/2006/math" xmlns:a14="http://schemas.microsoft.com/office/drawing/2010/main" xmlns:ma14="http://schemas.microsoft.com/office/mac/drawingml/2011/main" val="1"/>
+              <ma14:wrappingTextBoxFlag xmlns:ma14="http://schemas.microsoft.com/office/mac/drawingml/2011/main" xmlns:a14="http://schemas.microsoft.com/office/drawing/2010/main" xmlns:m="http://schemas.openxmlformats.org/officeDocument/2006/math" xmlns="" val="1"/>
             </a:ext>
           </a:extLst>
         </p:spPr>
@@ -6844,7 +6844,7 @@
           </a:ln>
           <a:extLst>
             <a:ext uri="{C572A759-6A51-4108-AA02-DFA0A04FC94B}">
-              <ma14:wrappingTextBoxFlag xmlns="" xmlns:m="http://schemas.openxmlformats.org/officeDocument/2006/math" xmlns:a14="http://schemas.microsoft.com/office/drawing/2010/main" xmlns:ma14="http://schemas.microsoft.com/office/mac/drawingml/2011/main" val="1"/>
+              <ma14:wrappingTextBoxFlag xmlns:ma14="http://schemas.microsoft.com/office/mac/drawingml/2011/main" xmlns:a14="http://schemas.microsoft.com/office/drawing/2010/main" xmlns:m="http://schemas.openxmlformats.org/officeDocument/2006/math" xmlns="" val="1"/>
             </a:ext>
           </a:extLst>
         </p:spPr>
@@ -6881,7 +6881,7 @@
           </a:ln>
           <a:extLst>
             <a:ext uri="{C572A759-6A51-4108-AA02-DFA0A04FC94B}">
-              <ma14:wrappingTextBoxFlag xmlns="" xmlns:m="http://schemas.openxmlformats.org/officeDocument/2006/math" xmlns:a14="http://schemas.microsoft.com/office/drawing/2010/main" xmlns:ma14="http://schemas.microsoft.com/office/mac/drawingml/2011/main" val="1"/>
+              <ma14:wrappingTextBoxFlag xmlns:ma14="http://schemas.microsoft.com/office/mac/drawingml/2011/main" xmlns:a14="http://schemas.microsoft.com/office/drawing/2010/main" xmlns:m="http://schemas.openxmlformats.org/officeDocument/2006/math" xmlns="" val="1"/>
             </a:ext>
           </a:extLst>
         </p:spPr>
@@ -6898,7 +6898,19 @@
             </a:pPr>
             <a:r>
               <a:rPr sz="2000" dirty="0"/>
-              <a:t>Installing/loading libraries  - library()</a:t>
+              <a:t>Installing/loading libraries  - </a:t>
+            </a:r>
+            <a:r>
+              <a:rPr lang="en-US" sz="2000" dirty="0" err="1"/>
+              <a:t>install.packages</a:t>
+            </a:r>
+            <a:r>
+              <a:rPr lang="en-US" sz="2000" dirty="0"/>
+              <a:t>() , </a:t>
+            </a:r>
+            <a:r>
+              <a:rPr sz="2000" dirty="0"/>
+              <a:t>library()</a:t>
             </a:r>
           </a:p>
           <a:p>
@@ -8169,7 +8181,7 @@
           </a:ln>
           <a:extLst>
             <a:ext uri="{C572A759-6A51-4108-AA02-DFA0A04FC94B}">
-              <ma14:wrappingTextBoxFlag xmlns="" xmlns:m="http://schemas.openxmlformats.org/officeDocument/2006/math" xmlns:a14="http://schemas.microsoft.com/office/drawing/2010/main" xmlns:ma14="http://schemas.microsoft.com/office/mac/drawingml/2011/main" val="1"/>
+              <ma14:wrappingTextBoxFlag xmlns:ma14="http://schemas.microsoft.com/office/mac/drawingml/2011/main" xmlns:a14="http://schemas.microsoft.com/office/drawing/2010/main" xmlns:m="http://schemas.openxmlformats.org/officeDocument/2006/math" xmlns="" val="1"/>
             </a:ext>
           </a:extLst>
         </p:spPr>
@@ -8199,7 +8211,13 @@
         <p:nvGraphicFramePr>
           <p:cNvPr id="367" name="Table 1"/>
           <p:cNvGraphicFramePr/>
-          <p:nvPr/>
+          <p:nvPr>
+            <p:extLst>
+              <p:ext uri="{D42A27DB-BD31-4B8C-83A1-F6EECF244321}">
+                <p14:modId xmlns:p14="http://schemas.microsoft.com/office/powerpoint/2010/main" val="95346365"/>
+              </p:ext>
+            </p:extLst>
+          </p:nvPr>
         </p:nvGraphicFramePr>
         <p:xfrm>
           <a:off x="2197395" y="1421165"/>
@@ -8391,9 +8409,10 @@
                     <a:p>
                       <a:pPr defTabSz="914400"/>
                       <a:r>
-                        <a:rPr sz="1600"/>
-                        <a:t>B</a:t>
+                        <a:rPr lang="en-US" sz="1600" dirty="0"/>
+                        <a:t>A</a:t>
                       </a:r>
+                      <a:endParaRPr sz="1600" dirty="0"/>
                     </a:p>
                   </a:txBody>
                   <a:tcPr marL="25400" marR="25400" marT="25400" marB="25400" anchor="ctr" horzOverflow="overflow"/>
@@ -8445,9 +8464,10 @@
                     <a:p>
                       <a:pPr defTabSz="914400"/>
                       <a:r>
-                        <a:rPr sz="1600"/>
-                        <a:t>C</a:t>
+                        <a:rPr lang="en-US" sz="1600" dirty="0"/>
+                        <a:t>B</a:t>
                       </a:r>
+                      <a:endParaRPr sz="1600" dirty="0"/>
                     </a:p>
                   </a:txBody>
                   <a:tcPr marL="25400" marR="25400" marT="25400" marB="25400" anchor="ctr" horzOverflow="overflow"/>
@@ -8499,9 +8519,10 @@
                     <a:p>
                       <a:pPr defTabSz="914400"/>
                       <a:r>
-                        <a:rPr sz="1600"/>
-                        <a:t>D</a:t>
+                        <a:rPr lang="en-US" sz="1600" dirty="0"/>
+                        <a:t>B</a:t>
                       </a:r>
+                      <a:endParaRPr sz="1600" dirty="0"/>
                     </a:p>
                   </a:txBody>
                   <a:tcPr marL="25400" marR="25400" marT="25400" marB="25400" anchor="ctr" horzOverflow="overflow"/>
@@ -8520,11 +8541,17 @@
         <p:nvGraphicFramePr>
           <p:cNvPr id="368" name="Table 1-1"/>
           <p:cNvGraphicFramePr/>
-          <p:nvPr/>
+          <p:nvPr>
+            <p:extLst>
+              <p:ext uri="{D42A27DB-BD31-4B8C-83A1-F6EECF244321}">
+                <p14:modId xmlns:p14="http://schemas.microsoft.com/office/powerpoint/2010/main" val="1806585984"/>
+              </p:ext>
+            </p:extLst>
+          </p:nvPr>
         </p:nvGraphicFramePr>
         <p:xfrm>
           <a:off x="7261420" y="1356725"/>
-          <a:ext cx="2924760" cy="1514470"/>
+          <a:ext cx="2924760" cy="925190"/>
         </p:xfrm>
         <a:graphic>
           <a:graphicData uri="http://schemas.openxmlformats.org/drawingml/2006/table">
@@ -8658,7 +8685,7 @@
                     <a:p>
                       <a:pPr defTabSz="914400"/>
                       <a:r>
-                        <a:rPr sz="1600"/>
+                        <a:rPr sz="1600" dirty="0"/>
                         <a:t>Normal</a:t>
                       </a:r>
                     </a:p>
@@ -8668,86 +8695,6 @@
                 <a:extLst>
                   <a:ext uri="{0D108BD9-81ED-4DB2-BD59-A6C34878D82A}">
                     <a16:rowId xmlns:a16="http://schemas.microsoft.com/office/drawing/2014/main" val="10002"/>
-                  </a:ext>
-                </a:extLst>
-              </a:tr>
-              <a:tr h="294640">
-                <a:tc>
-                  <a:txBody>
-                    <a:bodyPr/>
-                    <a:lstStyle/>
-                    <a:p>
-                      <a:pPr defTabSz="914400">
-                        <a:tabLst>
-                          <a:tab pos="1663700" algn="l"/>
-                        </a:tabLst>
-                        <a:defRPr b="0"/>
-                      </a:pPr>
-                      <a:r>
-                        <a:rPr sz="1600" b="1"/>
-                        <a:t>C</a:t>
-                      </a:r>
-                    </a:p>
-                  </a:txBody>
-                  <a:tcPr marL="25400" marR="25400" marT="25400" marB="25400" anchor="ctr" horzOverflow="overflow"/>
-                </a:tc>
-                <a:tc>
-                  <a:txBody>
-                    <a:bodyPr/>
-                    <a:lstStyle/>
-                    <a:p>
-                      <a:pPr defTabSz="914400"/>
-                      <a:r>
-                        <a:rPr sz="1600"/>
-                        <a:t>Tumor</a:t>
-                      </a:r>
-                    </a:p>
-                  </a:txBody>
-                  <a:tcPr marL="25400" marR="25400" marT="25400" marB="25400" anchor="ctr" horzOverflow="overflow"/>
-                </a:tc>
-                <a:extLst>
-                  <a:ext uri="{0D108BD9-81ED-4DB2-BD59-A6C34878D82A}">
-                    <a16:rowId xmlns:a16="http://schemas.microsoft.com/office/drawing/2014/main" val="10003"/>
-                  </a:ext>
-                </a:extLst>
-              </a:tr>
-              <a:tr h="294640">
-                <a:tc>
-                  <a:txBody>
-                    <a:bodyPr/>
-                    <a:lstStyle/>
-                    <a:p>
-                      <a:pPr defTabSz="914400">
-                        <a:tabLst>
-                          <a:tab pos="1663700" algn="l"/>
-                        </a:tabLst>
-                        <a:defRPr b="0"/>
-                      </a:pPr>
-                      <a:r>
-                        <a:rPr sz="1600" b="1"/>
-                        <a:t>D</a:t>
-                      </a:r>
-                    </a:p>
-                  </a:txBody>
-                  <a:tcPr marL="25400" marR="25400" marT="25400" marB="25400" anchor="ctr" horzOverflow="overflow"/>
-                </a:tc>
-                <a:tc>
-                  <a:txBody>
-                    <a:bodyPr/>
-                    <a:lstStyle/>
-                    <a:p>
-                      <a:pPr defTabSz="914400"/>
-                      <a:r>
-                        <a:rPr sz="1600"/>
-                        <a:t>Normal</a:t>
-                      </a:r>
-                    </a:p>
-                  </a:txBody>
-                  <a:tcPr marL="25400" marR="25400" marT="25400" marB="25400" anchor="ctr" horzOverflow="overflow"/>
-                </a:tc>
-                <a:extLst>
-                  <a:ext uri="{0D108BD9-81ED-4DB2-BD59-A6C34878D82A}">
-                    <a16:rowId xmlns:a16="http://schemas.microsoft.com/office/drawing/2014/main" val="10004"/>
                   </a:ext>
                 </a:extLst>
               </a:tr>
@@ -8799,7 +8746,7 @@
           </a:ln>
           <a:extLst>
             <a:ext uri="{C572A759-6A51-4108-AA02-DFA0A04FC94B}">
-              <ma14:wrappingTextBoxFlag xmlns="" xmlns:m="http://schemas.openxmlformats.org/officeDocument/2006/math" xmlns:a14="http://schemas.microsoft.com/office/drawing/2010/main" xmlns:ma14="http://schemas.microsoft.com/office/mac/drawingml/2011/main" val="1"/>
+              <ma14:wrappingTextBoxFlag xmlns:ma14="http://schemas.microsoft.com/office/mac/drawingml/2011/main" xmlns:a14="http://schemas.microsoft.com/office/drawing/2010/main" xmlns:m="http://schemas.openxmlformats.org/officeDocument/2006/math" xmlns="" val="1"/>
             </a:ext>
           </a:extLst>
         </p:spPr>
@@ -9789,7 +9736,7 @@
           </a:ln>
           <a:extLst>
             <a:ext uri="{C572A759-6A51-4108-AA02-DFA0A04FC94B}">
-              <ma14:wrappingTextBoxFlag xmlns="" xmlns:m="http://schemas.openxmlformats.org/officeDocument/2006/math" xmlns:a14="http://schemas.microsoft.com/office/drawing/2010/main" xmlns:ma14="http://schemas.microsoft.com/office/mac/drawingml/2011/main" val="1"/>
+              <ma14:wrappingTextBoxFlag xmlns:ma14="http://schemas.microsoft.com/office/mac/drawingml/2011/main" xmlns:a14="http://schemas.microsoft.com/office/drawing/2010/main" xmlns:m="http://schemas.openxmlformats.org/officeDocument/2006/math" xmlns="" val="1"/>
             </a:ext>
           </a:extLst>
         </p:spPr>
@@ -9884,7 +9831,7 @@
           </a:ln>
           <a:extLst>
             <a:ext uri="{C572A759-6A51-4108-AA02-DFA0A04FC94B}">
-              <ma14:wrappingTextBoxFlag xmlns="" xmlns:m="http://schemas.openxmlformats.org/officeDocument/2006/math" xmlns:a14="http://schemas.microsoft.com/office/drawing/2010/main" xmlns:ma14="http://schemas.microsoft.com/office/mac/drawingml/2011/main" val="1"/>
+              <ma14:wrappingTextBoxFlag xmlns:ma14="http://schemas.microsoft.com/office/mac/drawingml/2011/main" xmlns:a14="http://schemas.microsoft.com/office/drawing/2010/main" xmlns:m="http://schemas.openxmlformats.org/officeDocument/2006/math" xmlns="" val="1"/>
             </a:ext>
           </a:extLst>
         </p:spPr>
@@ -10952,7 +10899,7 @@
           </a:ln>
           <a:extLst>
             <a:ext uri="{C572A759-6A51-4108-AA02-DFA0A04FC94B}">
-              <ma14:wrappingTextBoxFlag xmlns="" xmlns:m="http://schemas.openxmlformats.org/officeDocument/2006/math" xmlns:a14="http://schemas.microsoft.com/office/drawing/2010/main" xmlns:ma14="http://schemas.microsoft.com/office/mac/drawingml/2011/main" val="1"/>
+              <ma14:wrappingTextBoxFlag xmlns:ma14="http://schemas.microsoft.com/office/mac/drawingml/2011/main" xmlns:a14="http://schemas.microsoft.com/office/drawing/2010/main" xmlns:m="http://schemas.openxmlformats.org/officeDocument/2006/math" xmlns="" val="1"/>
             </a:ext>
           </a:extLst>
         </p:spPr>
@@ -10988,7 +10935,7 @@
           </a:ln>
           <a:extLst>
             <a:ext uri="{C572A759-6A51-4108-AA02-DFA0A04FC94B}">
-              <ma14:wrappingTextBoxFlag xmlns="" xmlns:m="http://schemas.openxmlformats.org/officeDocument/2006/math" xmlns:a14="http://schemas.microsoft.com/office/drawing/2010/main" xmlns:ma14="http://schemas.microsoft.com/office/mac/drawingml/2011/main" val="1"/>
+              <ma14:wrappingTextBoxFlag xmlns:ma14="http://schemas.microsoft.com/office/mac/drawingml/2011/main" xmlns:a14="http://schemas.microsoft.com/office/drawing/2010/main" xmlns:m="http://schemas.openxmlformats.org/officeDocument/2006/math" xmlns="" val="1"/>
             </a:ext>
           </a:extLst>
         </p:spPr>
@@ -11060,7 +11007,7 @@
           </a:ln>
           <a:extLst>
             <a:ext uri="{C572A759-6A51-4108-AA02-DFA0A04FC94B}">
-              <ma14:wrappingTextBoxFlag xmlns="" xmlns:m="http://schemas.openxmlformats.org/officeDocument/2006/math" xmlns:a14="http://schemas.microsoft.com/office/drawing/2010/main" xmlns:ma14="http://schemas.microsoft.com/office/mac/drawingml/2011/main" val="1"/>
+              <ma14:wrappingTextBoxFlag xmlns:ma14="http://schemas.microsoft.com/office/mac/drawingml/2011/main" xmlns:a14="http://schemas.microsoft.com/office/drawing/2010/main" xmlns:m="http://schemas.openxmlformats.org/officeDocument/2006/math" xmlns="" val="1"/>
             </a:ext>
           </a:extLst>
         </p:spPr>
@@ -11153,7 +11100,7 @@
         <p:spPr>
           <a:xfrm>
             <a:off x="1366222" y="1602890"/>
-            <a:ext cx="12919934" cy="1477328"/>
+            <a:ext cx="12919934" cy="369332"/>
           </a:xfrm>
           <a:prstGeom prst="rect">
             <a:avLst/>
@@ -11169,51 +11116,7 @@
             <a:pPr marL="342900" indent="-342900">
               <a:buAutoNum type="arabicPeriod"/>
             </a:pPr>
-            <a:r>
-              <a:rPr lang="en-US" dirty="0"/>
-              <a:t>Load Duke vs UNC basketball data  - data/</a:t>
-            </a:r>
-            <a:r>
-              <a:rPr lang="en-US" dirty="0" err="1"/>
-              <a:t>duke_unc_hoops.csv</a:t>
-            </a:r>
             <a:endParaRPr lang="en-US" dirty="0"/>
-          </a:p>
-          <a:p>
-            <a:pPr marL="342900" indent="-342900">
-              <a:buAutoNum type="arabicPeriod"/>
-            </a:pPr>
-            <a:r>
-              <a:rPr lang="en-US" dirty="0"/>
-              <a:t>Make some plots to show which team is better</a:t>
-            </a:r>
-          </a:p>
-          <a:p>
-            <a:pPr marL="342900" indent="-342900">
-              <a:buAutoNum type="arabicPeriod"/>
-            </a:pPr>
-            <a:r>
-              <a:rPr lang="en-US" dirty="0"/>
-              <a:t>Use glimpse() to see an overview of the data frame (and data types)</a:t>
-            </a:r>
-          </a:p>
-          <a:p>
-            <a:pPr marL="342900" indent="-342900">
-              <a:buAutoNum type="arabicPeriod"/>
-            </a:pPr>
-            <a:r>
-              <a:rPr lang="en-US" dirty="0"/>
-              <a:t>Compare pre and post season ranking</a:t>
-            </a:r>
-          </a:p>
-          <a:p>
-            <a:pPr marL="342900" indent="-342900">
-              <a:buAutoNum type="arabicPeriod"/>
-            </a:pPr>
-            <a:r>
-              <a:rPr lang="en-US" dirty="0"/>
-              <a:t>Is there missing data? Why?</a:t>
-            </a:r>
           </a:p>
         </p:txBody>
       </p:sp>
@@ -11266,7 +11169,7 @@
           </a:ln>
           <a:extLst>
             <a:ext uri="{C572A759-6A51-4108-AA02-DFA0A04FC94B}">
-              <ma14:wrappingTextBoxFlag xmlns="" xmlns:m="http://schemas.openxmlformats.org/officeDocument/2006/math" xmlns:a14="http://schemas.microsoft.com/office/drawing/2010/main" xmlns:ma14="http://schemas.microsoft.com/office/mac/drawingml/2011/main" val="1"/>
+              <ma14:wrappingTextBoxFlag xmlns:ma14="http://schemas.microsoft.com/office/mac/drawingml/2011/main" xmlns:a14="http://schemas.microsoft.com/office/drawing/2010/main" xmlns:m="http://schemas.openxmlformats.org/officeDocument/2006/math" xmlns="" val="1"/>
             </a:ext>
           </a:extLst>
         </p:spPr>
@@ -11318,7 +11221,7 @@
           </a:ln>
           <a:extLst>
             <a:ext uri="{C572A759-6A51-4108-AA02-DFA0A04FC94B}">
-              <ma14:wrappingTextBoxFlag xmlns="" xmlns:m="http://schemas.openxmlformats.org/officeDocument/2006/math" xmlns:a14="http://schemas.microsoft.com/office/drawing/2010/main" xmlns:ma14="http://schemas.microsoft.com/office/mac/drawingml/2011/main" val="1"/>
+              <ma14:wrappingTextBoxFlag xmlns:ma14="http://schemas.microsoft.com/office/mac/drawingml/2011/main" xmlns:a14="http://schemas.microsoft.com/office/drawing/2010/main" xmlns:m="http://schemas.openxmlformats.org/officeDocument/2006/math" xmlns="" val="1"/>
             </a:ext>
           </a:extLst>
         </p:spPr>
@@ -11355,7 +11258,7 @@
           </a:ln>
           <a:extLst>
             <a:ext uri="{C572A759-6A51-4108-AA02-DFA0A04FC94B}">
-              <ma14:wrappingTextBoxFlag xmlns="" xmlns:m="http://schemas.openxmlformats.org/officeDocument/2006/math" xmlns:a14="http://schemas.microsoft.com/office/drawing/2010/main" xmlns:ma14="http://schemas.microsoft.com/office/mac/drawingml/2011/main" val="1"/>
+              <ma14:wrappingTextBoxFlag xmlns:ma14="http://schemas.microsoft.com/office/mac/drawingml/2011/main" xmlns:a14="http://schemas.microsoft.com/office/drawing/2010/main" xmlns:m="http://schemas.openxmlformats.org/officeDocument/2006/math" xmlns="" val="1"/>
             </a:ext>
           </a:extLst>
         </p:spPr>
@@ -11744,7 +11647,7 @@
           </a:ln>
           <a:extLst>
             <a:ext uri="{C572A759-6A51-4108-AA02-DFA0A04FC94B}">
-              <ma14:wrappingTextBoxFlag xmlns="" xmlns:m="http://schemas.openxmlformats.org/officeDocument/2006/math" xmlns:a14="http://schemas.microsoft.com/office/drawing/2010/main" xmlns:ma14="http://schemas.microsoft.com/office/mac/drawingml/2011/main" val="1"/>
+              <ma14:wrappingTextBoxFlag xmlns:ma14="http://schemas.microsoft.com/office/mac/drawingml/2011/main" xmlns:a14="http://schemas.microsoft.com/office/drawing/2010/main" xmlns:m="http://schemas.openxmlformats.org/officeDocument/2006/math" xmlns="" val="1"/>
             </a:ext>
           </a:extLst>
         </p:spPr>
@@ -11843,7 +11746,7 @@
           </a:ln>
           <a:extLst>
             <a:ext uri="{C572A759-6A51-4108-AA02-DFA0A04FC94B}">
-              <ma14:wrappingTextBoxFlag xmlns="" xmlns:m="http://schemas.openxmlformats.org/officeDocument/2006/math" xmlns:a14="http://schemas.microsoft.com/office/drawing/2010/main" xmlns:ma14="http://schemas.microsoft.com/office/mac/drawingml/2011/main" val="1"/>
+              <ma14:wrappingTextBoxFlag xmlns:ma14="http://schemas.microsoft.com/office/mac/drawingml/2011/main" xmlns:a14="http://schemas.microsoft.com/office/drawing/2010/main" xmlns:m="http://schemas.openxmlformats.org/officeDocument/2006/math" xmlns="" val="1"/>
             </a:ext>
           </a:extLst>
         </p:spPr>
@@ -11884,7 +11787,7 @@
           </a:ln>
           <a:extLst>
             <a:ext uri="{C572A759-6A51-4108-AA02-DFA0A04FC94B}">
-              <ma14:wrappingTextBoxFlag xmlns="" xmlns:m="http://schemas.openxmlformats.org/officeDocument/2006/math" xmlns:a14="http://schemas.microsoft.com/office/drawing/2010/main" xmlns:ma14="http://schemas.microsoft.com/office/mac/drawingml/2011/main" val="1"/>
+              <ma14:wrappingTextBoxFlag xmlns:ma14="http://schemas.microsoft.com/office/mac/drawingml/2011/main" xmlns:a14="http://schemas.microsoft.com/office/drawing/2010/main" xmlns:m="http://schemas.openxmlformats.org/officeDocument/2006/math" xmlns="" val="1"/>
             </a:ext>
           </a:extLst>
         </p:spPr>
@@ -11924,7 +11827,7 @@
           </a:ln>
           <a:extLst>
             <a:ext uri="{C572A759-6A51-4108-AA02-DFA0A04FC94B}">
-              <ma14:wrappingTextBoxFlag xmlns="" xmlns:m="http://schemas.openxmlformats.org/officeDocument/2006/math" xmlns:a14="http://schemas.microsoft.com/office/drawing/2010/main" xmlns:ma14="http://schemas.microsoft.com/office/mac/drawingml/2011/main" val="1"/>
+              <ma14:wrappingTextBoxFlag xmlns:ma14="http://schemas.microsoft.com/office/mac/drawingml/2011/main" xmlns:a14="http://schemas.microsoft.com/office/drawing/2010/main" xmlns:m="http://schemas.openxmlformats.org/officeDocument/2006/math" xmlns="" val="1"/>
             </a:ext>
           </a:extLst>
         </p:spPr>
@@ -12043,7 +11946,7 @@
           </a:ln>
           <a:extLst>
             <a:ext uri="{C572A759-6A51-4108-AA02-DFA0A04FC94B}">
-              <ma14:wrappingTextBoxFlag xmlns="" xmlns:m="http://schemas.openxmlformats.org/officeDocument/2006/math" xmlns:a14="http://schemas.microsoft.com/office/drawing/2010/main" xmlns:ma14="http://schemas.microsoft.com/office/mac/drawingml/2011/main" val="1"/>
+              <ma14:wrappingTextBoxFlag xmlns:ma14="http://schemas.microsoft.com/office/mac/drawingml/2011/main" xmlns:a14="http://schemas.microsoft.com/office/drawing/2010/main" xmlns:m="http://schemas.openxmlformats.org/officeDocument/2006/math" xmlns="" val="1"/>
             </a:ext>
           </a:extLst>
         </p:spPr>
@@ -12083,7 +11986,7 @@
           </a:ln>
           <a:extLst>
             <a:ext uri="{C572A759-6A51-4108-AA02-DFA0A04FC94B}">
-              <ma14:wrappingTextBoxFlag xmlns="" xmlns:m="http://schemas.openxmlformats.org/officeDocument/2006/math" xmlns:a14="http://schemas.microsoft.com/office/drawing/2010/main" xmlns:ma14="http://schemas.microsoft.com/office/mac/drawingml/2011/main" val="1"/>
+              <ma14:wrappingTextBoxFlag xmlns:ma14="http://schemas.microsoft.com/office/mac/drawingml/2011/main" xmlns:a14="http://schemas.microsoft.com/office/drawing/2010/main" xmlns:m="http://schemas.openxmlformats.org/officeDocument/2006/math" xmlns="" val="1"/>
             </a:ext>
           </a:extLst>
         </p:spPr>
@@ -12171,7 +12074,7 @@
           </a:ln>
           <a:extLst>
             <a:ext uri="{C572A759-6A51-4108-AA02-DFA0A04FC94B}">
-              <ma14:wrappingTextBoxFlag xmlns="" xmlns:m="http://schemas.openxmlformats.org/officeDocument/2006/math" xmlns:a14="http://schemas.microsoft.com/office/drawing/2010/main" xmlns:ma14="http://schemas.microsoft.com/office/mac/drawingml/2011/main" val="1"/>
+              <ma14:wrappingTextBoxFlag xmlns:ma14="http://schemas.microsoft.com/office/mac/drawingml/2011/main" xmlns:a14="http://schemas.microsoft.com/office/drawing/2010/main" xmlns:m="http://schemas.openxmlformats.org/officeDocument/2006/math" xmlns="" val="1"/>
             </a:ext>
           </a:extLst>
         </p:spPr>
@@ -12211,7 +12114,7 @@
           </a:ln>
           <a:extLst>
             <a:ext uri="{C572A759-6A51-4108-AA02-DFA0A04FC94B}">
-              <ma14:wrappingTextBoxFlag xmlns="" xmlns:m="http://schemas.openxmlformats.org/officeDocument/2006/math" xmlns:a14="http://schemas.microsoft.com/office/drawing/2010/main" xmlns:ma14="http://schemas.microsoft.com/office/mac/drawingml/2011/main" val="1"/>
+              <ma14:wrappingTextBoxFlag xmlns:ma14="http://schemas.microsoft.com/office/mac/drawingml/2011/main" xmlns:a14="http://schemas.microsoft.com/office/drawing/2010/main" xmlns:m="http://schemas.openxmlformats.org/officeDocument/2006/math" xmlns="" val="1"/>
             </a:ext>
           </a:extLst>
         </p:spPr>
